--- a/projetos/gestao-ia-planilhas/produto/kit-medicos/28-modelo-proposta-de-parceria-10-slides.pptx
+++ b/projetos/gestao-ia-planilhas/produto/kit-medicos/28-modelo-proposta-de-parceria-10-slides.pptx
@@ -783,7 +783,7 @@
           <a:p>
             <a:r>
               <a:rPr lang="en-US" dirty="0"/>
-              <a:t>Kit de Gestão para Médicos · modelo v1.0 · set/2026 · Modelo do Kit de Gestão para Médicos (v1.0, set/2026): troque os textos e mantenha a estrutura. O símbolo do canto está no slide mestre (Exibir &gt; Slide mestre): apague lá uma vez e some de todos. Capa. O título diz o que a clínica propõe, em linguagem do médico convidado. Validade sempre na capa. Turnos e sala vêm da Agenda (01, Config); o percentual de repasse, da planilha 11. O custo da hora (05), o custo da estrutura e a margem da parceria (11) ficam na clínica e não aparecem em nenhum slide.</a:t>
+              <a:t>Kit de Gestão para Médicos · modelo v1.0 · set/2026 · Modelo do Kit de Gestão para Médicos (v1.0, set/2026): troque os textos e mantenha a estrutura. O símbolo do canto está nos dois layouts, Claro e Escuro (Exibir &gt; Slide mestre): apague o símbolo nos dois e ele some de todos os slides. Capa. O título diz o que a clínica propõe, em linguagem do médico convidado. Validade sempre na capa. Turnos e sala vêm da Agenda (01, Config); o percentual de repasse, da planilha 11. O custo da hora (05), o custo da estrutura e a margem da parceria (11) ficam na clínica e não aparecem em nenhum slide.</a:t>
             </a:r>
             <a:endParaRPr lang="en-US" dirty="0"/>
           </a:p>
@@ -1399,7 +1399,7 @@
           <a:p>
             <a:r>
               <a:rPr lang="en-US" dirty="0"/>
-              <a:t>Kit de Gestão para Médicos · modelo v1.0 · set/2026 · Exemplo real. Só com autorização do parceiro atual, e só produção, horas e repasse (planilhas 01 e 11). Nenhum paciente, nenhum dado clínico, nenhum número interno da clínica. Se não houver parceiro ainda, troque por uma simulação e diga que é simulação. Gráfico nativo: clique &gt; Editar dados.</a:t>
+              <a:t>Kit de Gestão para Médicos · modelo v1.0 · set/2026 · Simulação. Por padrão este slide é simulação, com os números do exemplo do kit e sem nome de profissional: é o que se manda para um médico de fora. Para trocar pelo caso de um parceiro atual, com nome, é preciso autorização por escrito dele: produção, horas e repasse são dado de equipe identificado e não saem da clínica sem isso (bônus 23, seção 6). Mesmo com autorização, só produção, horas e repasse (planilhas 01 e 11): nenhum paciente, nenhum dado clínico, nenhum número interno da clínica. Gráfico nativo: clique &gt; Editar dados.</a:t>
             </a:r>
             <a:endParaRPr lang="en-US" dirty="0"/>
           </a:p>
@@ -3690,7 +3690,7 @@
                 <a:ea typeface="Arial" pitchFamily="34" charset="-122"/>
                 <a:cs typeface="Arial" pitchFamily="34" charset="-120"/>
               </a:rPr>
-              <a:t>8 horas de agenda por semana, cerca de 32 horas por mês (feriados descontados); consultas de [30] minutos e retornos de [20], ou a duração que a especialidade pedir.</a:t>
+              <a:t>Dois turnos de 4 horas: 8 horas de agenda por semana, cerca de 32 horas por mês (feriados descontados); consultas de [30] minutos e retornos de [20], ou a duração que a especialidade pedir.</a:t>
             </a:r>
             <a:endParaRPr lang="en-US" sz="1200" dirty="0"/>
           </a:p>
@@ -6070,7 +6070,7 @@
                 <a:ea typeface="Arial" pitchFamily="34" charset="-122"/>
                 <a:cs typeface="Arial" pitchFamily="34" charset="-120"/>
               </a:rPr>
-              <a:t>Como funciona na prática: a parceria da Dra. Renata</a:t>
+              <a:t>Como funciona na prática: oito meses simulados</a:t>
             </a:r>
             <a:endParaRPr lang="en-US" sz="2400" dirty="0"/>
           </a:p>
@@ -6109,7 +6109,7 @@
                 <a:ea typeface="Arial" pitchFamily="34" charset="-122"/>
                 <a:cs typeface="Arial" pitchFamily="34" charset="-120"/>
               </a:rPr>
-              <a:t>Endocrinologia, dois turnos por semana (terça e quinta à tarde, Sala 1) desde janeiro de 2026. Números de produção e repasse, com autorização dela.</a:t>
+              <a:t>Simulação com os números do exemplo do kit: um parceiro com dois turnos por semana, ao longo de oito meses. Não é o histórico de nenhum profissional identificado.</a:t>
             </a:r>
             <a:endParaRPr lang="en-US" sz="1200" dirty="0"/>
           </a:p>
@@ -6230,7 +6230,7 @@
                 <a:ea typeface="Arial" pitchFamily="34" charset="-122"/>
                 <a:cs typeface="Arial" pitchFamily="34" charset="-120"/>
               </a:rPr>
-              <a:t>Produção de agosto</a:t>
+              <a:t>Produção de um mês cheio</a:t>
             </a:r>
             <a:endParaRPr lang="en-US" sz="1200" dirty="0"/>
           </a:p>
@@ -6269,7 +6269,7 @@
                 <a:ea typeface="Arial" pitchFamily="34" charset="-122"/>
                 <a:cs typeface="Arial" pitchFamily="34" charset="-120"/>
               </a:rPr>
-              <a:t>30 avaliações endócrinas em 23,7 horas</a:t>
+              <a:t>30 atendimentos em 23,7 horas</a:t>
             </a:r>
             <a:endParaRPr lang="en-US" sz="950" dirty="0"/>
           </a:p>
@@ -6374,7 +6374,7 @@
                 <a:ea typeface="Arial" pitchFamily="34" charset="-122"/>
                 <a:cs typeface="Arial" pitchFamily="34" charset="-120"/>
               </a:rPr>
-              <a:t>Repasse de agosto</a:t>
+              <a:t>Repasse do mesmo mês</a:t>
             </a:r>
             <a:endParaRPr lang="en-US" sz="1200" dirty="0"/>
           </a:p>
@@ -6413,7 +6413,7 @@
                 <a:ea typeface="Arial" pitchFamily="34" charset="-122"/>
                 <a:cs typeface="Arial" pitchFamily="34" charset="-120"/>
               </a:rPr>
-              <a:t>pago em 10 de setembro, com demonstrativo</a:t>
+              <a:t>pago no dia 10, com demonstrativo</a:t>
             </a:r>
             <a:endParaRPr lang="en-US" sz="950" dirty="0"/>
           </a:p>
@@ -6427,8 +6427,8 @@
         </p:nvSpPr>
         <p:spPr>
           <a:xfrm>
-            <a:off x="5394960" y="3749040"/>
-            <a:ext cx="3291840" cy="777240"/>
+            <a:off x="5394960" y="3657600"/>
+            <a:ext cx="3291840" cy="1005840"/>
           </a:xfrm>
           <a:prstGeom prst="rect">
             <a:avLst/>
@@ -6444,7 +6444,7 @@
               <a:buNone/>
             </a:pPr>
             <a:r>
-              <a:rPr lang="en-US" sz="1050" dirty="0">
+              <a:rPr lang="en-US" sz="950" dirty="0">
                 <a:solidFill>
                   <a:srgbClr val="1F1235"/>
                 </a:solidFill>
@@ -6452,9 +6452,9 @@
                 <a:ea typeface="Arial" pitchFamily="34" charset="-122"/>
                 <a:cs typeface="Arial" pitchFamily="34" charset="-120"/>
               </a:rPr>
-              <a:t>Janeiro a agosto: R$ 74.830 de produção e R$ 37.415 de repasse, sempre no dia 10. A agenda dela está em 88 % de ocupação em setembro.</a:t>
-            </a:r>
-            <a:endParaRPr lang="en-US" sz="1050" dirty="0"/>
+              <a:t>Nos oito meses simulados: R$ 74.830 de produção e R$ 37.415 de repasse, sempre no dia 10, com a agenda em torno de 88 % de ocupação. [Para usar o caso de um parceiro real: só com autorização por escrito dele.]</a:t>
+            </a:r>
+            <a:endParaRPr lang="en-US" sz="950" dirty="0"/>
           </a:p>
         </p:txBody>
       </p:sp>
